--- a/brand/ignite-search-recruiting-pitch.pptx
+++ b/brand/ignite-search-recruiting-pitch.pptx
@@ -112,18 +112,18 @@
   <p:extLst>
     <p:ext uri="{521415D9-36F7-43E2-AB2F-B90AF26B5E84}">
       <p14:sectionLst xmlns:p14="http://schemas.microsoft.com/office/powerpoint/2010/main">
-        <p14:section name="Cover" id="{3cf1d9ec-35ae-8422-e63e-11bde537d795}">
+        <p14:section name="Cover" id="{56b36abe-3f52-e687-0de4-502e6df2e674}">
           <p14:sldIdLst>
             <p14:sldId id="256"/>
           </p14:sldIdLst>
         </p14:section>
-        <p14:section name="Who" id="{22e3fc13-b65c-7416-c3bb-78688d2fdb9d}">
+        <p14:section name="Who" id="{3e2af19d-528f-39cf-96da-06688234ac3a}">
           <p14:sldIdLst>
             <p14:sldId id="257"/>
             <p14:sldId id="258"/>
           </p14:sldIdLst>
         </p14:section>
-        <p14:section name="Role" id="{06f67231-5c10-5f0a-bcf3-3f121abaef57}">
+        <p14:section name="Role" id="{6de4ec1c-6448-9581-0651-a430f811a694}">
           <p14:sldIdLst>
             <p14:sldId id="259"/>
             <p14:sldId id="260"/>
@@ -1087,7 +1087,7 @@
         <p:spPr>
           <a:xfrm>
             <a:off x="658368" y="548640"/>
-            <a:ext cx="2192731" cy="726948"/>
+            <a:ext cx="2306117" cy="726948"/>
           </a:xfrm>
           <a:prstGeom prst="rect">
             <a:avLst/>
@@ -1226,7 +1226,7 @@
             <a:avLst/>
           </a:prstGeom>
           <a:solidFill>
-            <a:srgbClr val="F2D416"/>
+            <a:srgbClr val="F2D216"/>
           </a:solidFill>
           <a:ln/>
         </p:spPr>
@@ -1289,7 +1289,7 @@
               <a:buNone/>
               <a:defRPr lang="en-US" sz="1300" b="1" spc="400" kern="0" dirty="0">
                 <a:solidFill>
-                  <a:srgbClr val="F2D416"/>
+                  <a:srgbClr val="F2D216"/>
                 </a:solidFill>
               </a:defRPr>
             </a:lvl1pPr>
@@ -1358,7 +1358,7 @@
         <p:spPr>
           <a:xfrm>
             <a:off x="10332720" y="5852160"/>
-            <a:ext cx="1238098" cy="410566"/>
+            <a:ext cx="1302106" cy="410566"/>
           </a:xfrm>
           <a:prstGeom prst="rect">
             <a:avLst/>
@@ -1380,7 +1380,7 @@
             <a:avLst/>
           </a:prstGeom>
           <a:solidFill>
-            <a:srgbClr val="F2D416"/>
+            <a:srgbClr val="F2D216"/>
           </a:solidFill>
           <a:ln/>
         </p:spPr>
@@ -1512,7 +1512,7 @@
         <p:spPr>
           <a:xfrm>
             <a:off x="10716768" y="6053328"/>
-            <a:ext cx="904342" cy="299923"/>
+            <a:ext cx="950976" cy="299923"/>
           </a:xfrm>
           <a:prstGeom prst="rect">
             <a:avLst/>
@@ -1646,7 +1646,7 @@
         <p:spPr>
           <a:xfrm>
             <a:off x="10716768" y="6053328"/>
-            <a:ext cx="904342" cy="299923"/>
+            <a:ext cx="950976" cy="299923"/>
           </a:xfrm>
           <a:prstGeom prst="rect">
             <a:avLst/>
@@ -1750,7 +1750,7 @@
               <a:buNone/>
               <a:defRPr lang="en-US" sz="6000" dirty="0">
                 <a:solidFill>
-                  <a:srgbClr val="F2D416"/>
+                  <a:srgbClr val="F2D216"/>
                 </a:solidFill>
               </a:defRPr>
             </a:lvl1pPr>
@@ -1819,7 +1819,7 @@
         <p:spPr>
           <a:xfrm>
             <a:off x="10332720" y="5760720"/>
-            <a:ext cx="1238098" cy="410566"/>
+            <a:ext cx="1302106" cy="410566"/>
           </a:xfrm>
           <a:prstGeom prst="rect">
             <a:avLst/>
@@ -1841,7 +1841,7 @@
             <a:avLst/>
           </a:prstGeom>
           <a:solidFill>
-            <a:srgbClr val="F2D416"/>
+            <a:srgbClr val="F2D216"/>
           </a:solidFill>
           <a:ln/>
         </p:spPr>
@@ -2379,7 +2379,7 @@
             <a:avLst/>
           </a:prstGeom>
           <a:solidFill>
-            <a:srgbClr val="F2D416"/>
+            <a:srgbClr val="F2D216"/>
           </a:solidFill>
           <a:ln/>
         </p:spPr>
@@ -2547,7 +2547,7 @@
             <a:avLst/>
           </a:prstGeom>
           <a:solidFill>
-            <a:srgbClr val="F2D416"/>
+            <a:srgbClr val="F2D216"/>
           </a:solidFill>
           <a:ln/>
         </p:spPr>
@@ -2715,7 +2715,7 @@
             <a:avLst/>
           </a:prstGeom>
           <a:solidFill>
-            <a:srgbClr val="F2D416"/>
+            <a:srgbClr val="F2D216"/>
           </a:solidFill>
           <a:ln/>
         </p:spPr>
@@ -2954,7 +2954,7 @@
             <a:r>
               <a:rPr lang="en-US" sz="7600" dirty="0">
                 <a:solidFill>
-                  <a:srgbClr val="F2D416"/>
+                  <a:srgbClr val="F2D216"/>
                 </a:solidFill>
                 <a:latin typeface="Bebas Neue" pitchFamily="34" charset="0"/>
                 <a:ea typeface="Bebas Neue" pitchFamily="34" charset="-122"/>
@@ -3029,7 +3029,7 @@
             <a:r>
               <a:rPr lang="en-US" sz="7600" dirty="0">
                 <a:solidFill>
-                  <a:srgbClr val="F2D416"/>
+                  <a:srgbClr val="F2D216"/>
                 </a:solidFill>
                 <a:latin typeface="Bebas Neue" pitchFamily="34" charset="0"/>
                 <a:ea typeface="Bebas Neue" pitchFamily="34" charset="-122"/>
@@ -3104,7 +3104,7 @@
             <a:r>
               <a:rPr lang="en-US" sz="7600" dirty="0">
                 <a:solidFill>
-                  <a:srgbClr val="F2D416"/>
+                  <a:srgbClr val="F2D216"/>
                 </a:solidFill>
                 <a:latin typeface="Bebas Neue" pitchFamily="34" charset="0"/>
                 <a:ea typeface="Bebas Neue" pitchFamily="34" charset="-122"/>
@@ -3179,7 +3179,7 @@
             <a:r>
               <a:rPr lang="en-US" sz="7600" dirty="0">
                 <a:solidFill>
-                  <a:srgbClr val="F2D416"/>
+                  <a:srgbClr val="F2D216"/>
                 </a:solidFill>
                 <a:latin typeface="Bebas Neue" pitchFamily="34" charset="0"/>
                 <a:ea typeface="Bebas Neue" pitchFamily="34" charset="-122"/>
@@ -3374,7 +3374,7 @@
             <a:r>
               <a:rPr lang="en-US" sz="1300" b="1" spc="400" kern="0" dirty="0">
                 <a:solidFill>
-                  <a:srgbClr val="F2D416"/>
+                  <a:srgbClr val="F2D216"/>
                 </a:solidFill>
               </a:rPr>
               <a:t>THE ROLE</a:t>
@@ -3563,7 +3563,7 @@
             <a:avLst/>
           </a:prstGeom>
           <a:solidFill>
-            <a:srgbClr val="F2D416"/>
+            <a:srgbClr val="F2D216"/>
           </a:solidFill>
           <a:ln/>
         </p:spPr>
@@ -3731,7 +3731,7 @@
             <a:avLst/>
           </a:prstGeom>
           <a:solidFill>
-            <a:srgbClr val="F2D416"/>
+            <a:srgbClr val="F2D216"/>
           </a:solidFill>
           <a:ln/>
         </p:spPr>
@@ -3899,7 +3899,7 @@
             <a:avLst/>
           </a:prstGeom>
           <a:solidFill>
-            <a:srgbClr val="F2D416"/>
+            <a:srgbClr val="F2D216"/>
           </a:solidFill>
           <a:ln/>
         </p:spPr>
@@ -4102,7 +4102,7 @@
             <a:r>
               <a:rPr lang="en-US" sz="6000" dirty="0">
                 <a:solidFill>
-                  <a:srgbClr val="F2D416"/>
+                  <a:srgbClr val="F2D216"/>
                 </a:solidFill>
               </a:rPr>
               <a:t>JUST WATCH US</a:t>
@@ -4174,7 +4174,7 @@
         <a:srgbClr val="FAF9F6"/>
       </a:lt2>
       <a:accent1>
-        <a:srgbClr val="F2D416"/>
+        <a:srgbClr val="F2D216"/>
       </a:accent1>
       <a:accent2>
         <a:srgbClr val="FFE94F"/>
